--- a/curso_es/pptx/S05.pptx
+++ b/curso_es/pptx/S05.pptx
@@ -4489,7 +4489,7 @@
                 </a:solidFill>
                 <a:latin typeface="Nunito Sans"/>
               </a:rPr>
-              <a:t>Maialen cree que una crema para granos funciona. La usa toda su cuadrilla, la anuncia su influencer favorita y a ella le hace mucha ilusión.</a:t>
+              <a:t>Una chica cree que una crema para granos funciona. La usa toda su cuadrilla, la anuncia su influencer favorita y a ella le hace mucha ilusión.</a:t>
             </a:r>
           </a:p>
         </p:txBody>
@@ -4852,7 +4852,7 @@
                 </a:solidFill>
                 <a:latin typeface="Nunito Sans"/>
               </a:rPr>
-              <a:t>Chen cree que la Tierra gira alrededor del Sol. Nunca lo ha comprobado: se lo explicó su profesora.</a:t>
+              <a:t>Un chico cree que la Tierra gira alrededor del Sol. Nunca lo ha comprobado: se lo explicó su profesora.</a:t>
             </a:r>
           </a:p>
         </p:txBody>
@@ -6578,7 +6578,7 @@
                 </a:solidFill>
                 <a:latin typeface="Nunito Sans"/>
               </a:rPr>
-              <a:t>Todos en tu clase llevan las mismas zapatillas. Sin darte cuenta, empiezas a pensar que son las mejores.</a:t>
+              <a:t>Todos en la clase de una chica llevan las mismas zapatillas. Sin darse cuenta, ella empieza a pensar que son las mejores.</a:t>
             </a:r>
           </a:p>
         </p:txBody>
@@ -6617,7 +6617,7 @@
                 </a:solidFill>
                 <a:latin typeface="Nunito Sans"/>
               </a:rPr>
-              <a:t>¿Lo piensas por una razón… o por otra cosa?</a:t>
+              <a:t>¿Lo piensa por una razón… o por otra cosa?</a:t>
             </a:r>
           </a:p>
         </p:txBody>
